--- a/Matrix1.pptx
+++ b/Matrix1.pptx
@@ -137,7 +137,7 @@
     </p:spTree>
     <p:extLst>
       <p:ext uri="{BB962C8B-B14F-4D97-AF65-F5344CB8AC3E}">
-        <p14:creationId xmlns:p14="http://schemas.microsoft.com/office/powerpoint/2010/main" val="3293876368"/>
+        <p14:creationId xmlns:p14="http://schemas.microsoft.com/office/powerpoint/2010/main" val="643832312"/>
       </p:ext>
     </p:extLst>
   </p:cSld>
@@ -691,7 +691,7 @@
                 <a:ea typeface="Calibri" pitchFamily="34" charset="-122"/>
                 <a:cs typeface="Calibri" pitchFamily="34" charset="-120"/>
               </a:rPr>
-              <a:t>FCU Transition Evolution — Tracking Categories Across 1, 3, and 5 Years</a:t>
+              <a:t>FISCU Transition Evolution — Tracking Categories Across 1, 3, and 5 Years</a:t>
             </a:r>
             <a:endParaRPr lang="en-US" sz="2600" dirty="0"/>
           </a:p>
@@ -744,7 +744,7 @@
         </p:nvSpPr>
         <p:spPr>
           <a:xfrm>
-            <a:off x="365760" y="1143000"/>
+            <a:off x="365760" y="1097280"/>
             <a:ext cx="3749040" cy="274320"/>
           </a:xfrm>
           <a:prstGeom prst="rect">
@@ -783,8 +783,8 @@
         </p:nvSpPr>
         <p:spPr>
           <a:xfrm>
-            <a:off x="365760" y="1463040"/>
-            <a:ext cx="3749040" cy="2377440"/>
+            <a:off x="365760" y="1417320"/>
+            <a:ext cx="3749040" cy="2240280"/>
           </a:xfrm>
           <a:prstGeom prst="rect">
             <a:avLst/>
@@ -815,7 +815,7 @@
         </p:nvSpPr>
         <p:spPr>
           <a:xfrm>
-            <a:off x="365760" y="2468880"/>
+            <a:off x="365760" y="2354580"/>
             <a:ext cx="3749040" cy="365760"/>
           </a:xfrm>
           <a:prstGeom prst="rect">
@@ -840,7 +840,7 @@
                 <a:ea typeface="Calibri" pitchFamily="34" charset="-122"/>
                 <a:cs typeface="Calibri" pitchFamily="34" charset="-120"/>
               </a:rPr>
-              <a:t>[ Insert matrix chart here ]</a:t>
+              <a:t>[ Insert FISCU matrix chart here ]</a:t>
             </a:r>
             <a:endParaRPr lang="en-US" sz="1100" dirty="0"/>
           </a:p>
@@ -854,7 +854,7 @@
         </p:nvSpPr>
         <p:spPr>
           <a:xfrm>
-            <a:off x="4297680" y="1143000"/>
+            <a:off x="4297680" y="1097280"/>
             <a:ext cx="3749040" cy="274320"/>
           </a:xfrm>
           <a:prstGeom prst="rect">
@@ -893,8 +893,8 @@
         </p:nvSpPr>
         <p:spPr>
           <a:xfrm>
-            <a:off x="4297680" y="1463040"/>
-            <a:ext cx="3749040" cy="2377440"/>
+            <a:off x="4297680" y="1417320"/>
+            <a:ext cx="3749040" cy="2240280"/>
           </a:xfrm>
           <a:prstGeom prst="rect">
             <a:avLst/>
@@ -925,7 +925,7 @@
         </p:nvSpPr>
         <p:spPr>
           <a:xfrm>
-            <a:off x="4297680" y="2468880"/>
+            <a:off x="4297680" y="2354580"/>
             <a:ext cx="3749040" cy="365760"/>
           </a:xfrm>
           <a:prstGeom prst="rect">
@@ -950,7 +950,7 @@
                 <a:ea typeface="Calibri" pitchFamily="34" charset="-122"/>
                 <a:cs typeface="Calibri" pitchFamily="34" charset="-120"/>
               </a:rPr>
-              <a:t>[ Insert matrix chart here ]</a:t>
+              <a:t>[ Insert FISCU matrix chart here ]</a:t>
             </a:r>
             <a:endParaRPr lang="en-US" sz="1100" dirty="0"/>
           </a:p>
@@ -964,7 +964,7 @@
         </p:nvSpPr>
         <p:spPr>
           <a:xfrm>
-            <a:off x="8229600" y="1143000"/>
+            <a:off x="8229600" y="1097280"/>
             <a:ext cx="3749040" cy="274320"/>
           </a:xfrm>
           <a:prstGeom prst="rect">
@@ -1003,8 +1003,8 @@
         </p:nvSpPr>
         <p:spPr>
           <a:xfrm>
-            <a:off x="8229600" y="1463040"/>
-            <a:ext cx="3749040" cy="2377440"/>
+            <a:off x="8229600" y="1417320"/>
+            <a:ext cx="3749040" cy="2240280"/>
           </a:xfrm>
           <a:prstGeom prst="rect">
             <a:avLst/>
@@ -1035,7 +1035,7 @@
         </p:nvSpPr>
         <p:spPr>
           <a:xfrm>
-            <a:off x="8229600" y="2468880"/>
+            <a:off x="8229600" y="2354580"/>
             <a:ext cx="3749040" cy="365760"/>
           </a:xfrm>
           <a:prstGeom prst="rect">
@@ -1060,7 +1060,7 @@
                 <a:ea typeface="Calibri" pitchFamily="34" charset="-122"/>
                 <a:cs typeface="Calibri" pitchFamily="34" charset="-120"/>
               </a:rPr>
-              <a:t>[ Insert matrix chart here ]</a:t>
+              <a:t>[ Insert FISCU matrix chart here ]</a:t>
             </a:r>
             <a:endParaRPr lang="en-US" sz="1100" dirty="0"/>
           </a:p>
@@ -1074,8 +1074,8 @@
         </p:nvSpPr>
         <p:spPr>
           <a:xfrm>
-            <a:off x="365760" y="3977640"/>
-            <a:ext cx="11430000" cy="292608"/>
+            <a:off x="365760" y="3886200"/>
+            <a:ext cx="11430000" cy="274320"/>
           </a:xfrm>
           <a:prstGeom prst="rect">
             <a:avLst/>
@@ -1091,7 +1091,7 @@
               <a:buNone/>
             </a:pPr>
             <a:r>
-              <a:rPr lang="en-US" sz="1500" b="1" dirty="0">
+              <a:rPr lang="en-US" sz="1400" b="1" dirty="0">
                 <a:solidFill>
                   <a:srgbClr val="0B1D3A"/>
                 </a:solidFill>
@@ -1101,7 +1101,7 @@
               </a:rPr>
               <a:t>Tracking each category's evolution over time:</a:t>
             </a:r>
-            <a:endParaRPr lang="en-US" sz="1500" dirty="0"/>
+            <a:endParaRPr lang="en-US" sz="1400" dirty="0"/>
           </a:p>
         </p:txBody>
       </p:sp>
@@ -1113,8 +1113,8 @@
         </p:nvSpPr>
         <p:spPr>
           <a:xfrm>
-            <a:off x="365760" y="4325112"/>
-            <a:ext cx="5760720" cy="2331720"/>
+            <a:off x="365760" y="4197096"/>
+            <a:ext cx="5760720" cy="2606040"/>
           </a:xfrm>
           <a:prstGeom prst="rect">
             <a:avLst/>
@@ -1126,26 +1126,26 @@
           <a:bodyPr wrap="square" lIns="0" tIns="0" rIns="0" bIns="0" rtlCol="0" anchor="ctr"/>
           <a:lstStyle/>
           <a:p>
-            <a:pPr marL="177800" indent="-177800">
+            <a:pPr marL="152400" indent="-152400">
               <a:spcAft>
-                <a:spcPts val="200"/>
+                <a:spcPts val="100"/>
               </a:spcAft>
               <a:buSzPct val="100000"/>
               <a:buChar char="■"/>
             </a:pPr>
             <a:r>
-              <a:rPr lang="en-US" sz="1100" b="1" dirty="0">
-                <a:solidFill>
-                  <a:srgbClr val="E76F51"/>
-                </a:solidFill>
-                <a:latin typeface="Calibri" pitchFamily="34" charset="0"/>
-                <a:ea typeface="Calibri" pitchFamily="34" charset="-122"/>
-                <a:cs typeface="Calibri" pitchFamily="34" charset="-120"/>
-              </a:rPr>
-              <a:t>Category 3 ($50M–$100M)</a:t>
-            </a:r>
-            <a:r>
-              <a:rPr lang="en-US" sz="1100" dirty="0">
+              <a:rPr lang="en-US" sz="1000" b="1" dirty="0">
+                <a:solidFill>
+                  <a:srgbClr val="2EC4B6"/>
+                </a:solidFill>
+                <a:latin typeface="Calibri" pitchFamily="34" charset="0"/>
+                <a:ea typeface="Calibri" pitchFamily="34" charset="-122"/>
+                <a:cs typeface="Calibri" pitchFamily="34" charset="-120"/>
+              </a:rPr>
+              <a:t>Category 5 ($500M–$1B)</a:t>
+            </a:r>
+            <a:r>
+              <a:rPr lang="en-US" sz="1000" dirty="0">
                 <a:solidFill>
                   <a:srgbClr val="333333"/>
                 </a:solidFill>
@@ -1153,39 +1153,39 @@
                 <a:ea typeface="Calibri" pitchFamily="34" charset="-122"/>
                 <a:cs typeface="Calibri" pitchFamily="34" charset="-120"/>
               </a:rPr>
-              <a:t> — most active migration zone. Retention drops 93% → 75% → 64%. Migration accelerates: 7% cross $100M in year 1, 23% by year 3, 34% by year 5.</a:t>
-            </a:r>
-            <a:endParaRPr lang="en-US" sz="1100" dirty="0"/>
+              <a:t> — the standout migration zone. Retention drops 93% → 75% → 58%. 42% of these FISCUs become billion-dollar institutions by year 5.</a:t>
+            </a:r>
+            <a:endParaRPr lang="en-US" sz="1000" dirty="0"/>
           </a:p>
           <a:p>
             <a:pPr marL="0" indent="0">
               <a:spcAft>
-                <a:spcPts val="200"/>
+                <a:spcPts val="100"/>
               </a:spcAft>
               <a:buNone/>
             </a:pPr>
-            <a:endParaRPr lang="en-US" sz="1100" dirty="0"/>
+            <a:endParaRPr lang="en-US" sz="1000" dirty="0"/>
           </a:p>
           <a:p>
             <a:pPr marL="0" indent="0">
               <a:spcAft>
-                <a:spcPts val="200"/>
+                <a:spcPts val="100"/>
               </a:spcAft>
               <a:buNone/>
             </a:pPr>
             <a:r>
-              <a:rPr lang="en-US" sz="1100" b="1" dirty="0">
-                <a:solidFill>
-                  <a:srgbClr val="2EC4B6"/>
-                </a:solidFill>
-                <a:latin typeface="Calibri" pitchFamily="34" charset="0"/>
-                <a:ea typeface="Calibri" pitchFamily="34" charset="-122"/>
-                <a:cs typeface="Calibri" pitchFamily="34" charset="-120"/>
-              </a:rPr>
-              <a:t>Category 5 ($500M–$1B)</a:t>
-            </a:r>
-            <a:r>
-              <a:rPr lang="en-US" sz="1100" dirty="0">
+              <a:rPr lang="en-US" sz="1000" b="1" dirty="0">
+                <a:solidFill>
+                  <a:srgbClr val="E76F51"/>
+                </a:solidFill>
+                <a:latin typeface="Calibri" pitchFamily="34" charset="0"/>
+                <a:ea typeface="Calibri" pitchFamily="34" charset="-122"/>
+                <a:cs typeface="Calibri" pitchFamily="34" charset="-120"/>
+              </a:rPr>
+              <a:t>Category 3 ($50M–$100M)</a:t>
+            </a:r>
+            <a:r>
+              <a:rPr lang="en-US" sz="1000" dirty="0">
                 <a:solidFill>
                   <a:srgbClr val="333333"/>
                 </a:solidFill>
@@ -1193,28 +1193,28 @@
                 <a:ea typeface="Calibri" pitchFamily="34" charset="-122"/>
                 <a:cs typeface="Calibri" pitchFamily="34" charset="-120"/>
               </a:rPr>
-              <a:t> — the billion-dollar pipeline. Retention drops 92% → 72% → 52%. By year 5, nearly half of these CUs become billion-dollar institutions.</a:t>
-            </a:r>
-            <a:endParaRPr lang="en-US" sz="1100" dirty="0"/>
+              <a:t> — accelerating consolidation. Retention drops 93% → 78% → 63%. One in three FISCUs grows past $100M by year 5.</a:t>
+            </a:r>
+            <a:endParaRPr lang="en-US" sz="1000" dirty="0"/>
           </a:p>
           <a:p>
             <a:pPr marL="0" indent="0">
               <a:spcAft>
-                <a:spcPts val="200"/>
+                <a:spcPts val="100"/>
               </a:spcAft>
               <a:buNone/>
             </a:pPr>
-            <a:endParaRPr lang="en-US" sz="1100" dirty="0"/>
+            <a:endParaRPr lang="en-US" sz="1000" dirty="0"/>
           </a:p>
           <a:p>
             <a:pPr marL="0" indent="0">
               <a:spcAft>
-                <a:spcPts val="200"/>
+                <a:spcPts val="100"/>
               </a:spcAft>
               <a:buNone/>
             </a:pPr>
             <a:r>
-              <a:rPr lang="en-US" sz="1100" b="1" dirty="0">
+              <a:rPr lang="en-US" sz="1000" b="1" dirty="0">
                 <a:solidFill>
                   <a:srgbClr val="5B9BD5"/>
                 </a:solidFill>
@@ -1225,7 +1225,7 @@
               <a:t>Category 6 ($1B–$10B)</a:t>
             </a:r>
             <a:r>
-              <a:rPr lang="en-US" sz="1100" dirty="0">
+              <a:rPr lang="en-US" sz="1000" dirty="0">
                 <a:solidFill>
                   <a:srgbClr val="333333"/>
                 </a:solidFill>
@@ -1233,28 +1233,68 @@
                 <a:ea typeface="Calibri" pitchFamily="34" charset="-122"/>
                 <a:cs typeface="Calibri" pitchFamily="34" charset="-120"/>
               </a:rPr>
-              <a:t> — the path to Dodd-Frank. Retention 97% → 95% → 93%. Steady drip across $10B reshapes the supervisory landscape.</a:t>
-            </a:r>
-            <a:endParaRPr lang="en-US" sz="1100" dirty="0"/>
+              <a:t> — heavier flow toward Dodd-Frank. 23 FISCUs (9%) cross $10B by year 5 — proportionally more than FCUs (7%).</a:t>
+            </a:r>
+            <a:endParaRPr lang="en-US" sz="1000" dirty="0"/>
           </a:p>
           <a:p>
             <a:pPr marL="0" indent="0">
               <a:spcAft>
-                <a:spcPts val="200"/>
+                <a:spcPts val="100"/>
               </a:spcAft>
               <a:buNone/>
             </a:pPr>
-            <a:endParaRPr lang="en-US" sz="1100" dirty="0"/>
+            <a:endParaRPr lang="en-US" sz="1000" dirty="0"/>
           </a:p>
           <a:p>
             <a:pPr marL="0" indent="0">
               <a:spcAft>
-                <a:spcPts val="200"/>
+                <a:spcPts val="100"/>
               </a:spcAft>
               <a:buNone/>
             </a:pPr>
             <a:r>
-              <a:rPr lang="en-US" sz="1100" b="1" dirty="0">
+              <a:rPr lang="en-US" sz="1000" b="1" dirty="0">
+                <a:solidFill>
+                  <a:srgbClr val="F4A261"/>
+                </a:solidFill>
+                <a:latin typeface="Calibri" pitchFamily="34" charset="0"/>
+                <a:ea typeface="Calibri" pitchFamily="34" charset="-122"/>
+                <a:cs typeface="Calibri" pitchFamily="34" charset="-120"/>
+              </a:rPr>
+              <a:t>Category 2 ($10M–$50M)</a:t>
+            </a:r>
+            <a:r>
+              <a:rPr lang="en-US" sz="1000" dirty="0">
+                <a:solidFill>
+                  <a:srgbClr val="333333"/>
+                </a:solidFill>
+                <a:latin typeface="Calibri" pitchFamily="34" charset="0"/>
+                <a:ea typeface="Calibri" pitchFamily="34" charset="-122"/>
+                <a:cs typeface="Calibri" pitchFamily="34" charset="-120"/>
+              </a:rPr>
+              <a:t> — small but persistent downward flow. 1–2% drop to Cat 1 at every horizon — a pattern essentially absent in FCUs.</a:t>
+            </a:r>
+            <a:endParaRPr lang="en-US" sz="1000" dirty="0"/>
+          </a:p>
+          <a:p>
+            <a:pPr marL="0" indent="0">
+              <a:spcAft>
+                <a:spcPts val="100"/>
+              </a:spcAft>
+              <a:buNone/>
+            </a:pPr>
+            <a:endParaRPr lang="en-US" sz="1000" dirty="0"/>
+          </a:p>
+          <a:p>
+            <a:pPr marL="0" indent="0">
+              <a:spcAft>
+                <a:spcPts val="100"/>
+              </a:spcAft>
+              <a:buNone/>
+            </a:pPr>
+            <a:r>
+              <a:rPr lang="en-US" sz="1000" b="1" dirty="0">
                 <a:solidFill>
                   <a:srgbClr val="0B1D3A"/>
                 </a:solidFill>
@@ -1265,7 +1305,7 @@
               <a:t>Categories 1 and 7</a:t>
             </a:r>
             <a:r>
-              <a:rPr lang="en-US" sz="1100" dirty="0">
+              <a:rPr lang="en-US" sz="1000" dirty="0">
                 <a:solidFill>
                   <a:srgbClr val="333333"/>
                 </a:solidFill>
@@ -1273,9 +1313,9 @@
                 <a:ea typeface="Calibri" pitchFamily="34" charset="-122"/>
                 <a:cs typeface="Calibri" pitchFamily="34" charset="-120"/>
               </a:rPr>
-              <a:t> — the system's anchors. Cat 1 (&lt;$10M): 99% → 96% → 93% (slow erosion). Cat 7 ($10B+): 100% retention at every horizon.</a:t>
-            </a:r>
-            <a:endParaRPr lang="en-US" sz="1100" dirty="0"/>
+              <a:t> — the system's anchors. Cat 1 (&lt;$10M): 99% → 99% → 96% retention. Cat 7 ($10B+): 100% retention always.</a:t>
+            </a:r>
+            <a:endParaRPr lang="en-US" sz="1000" dirty="0"/>
           </a:p>
         </p:txBody>
       </p:sp>
@@ -1287,8 +1327,8 @@
         </p:nvSpPr>
         <p:spPr>
           <a:xfrm>
-            <a:off x="6263640" y="4325112"/>
-            <a:ext cx="5760720" cy="2331720"/>
+            <a:off x="6263640" y="4197096"/>
+            <a:ext cx="5760720" cy="2606040"/>
           </a:xfrm>
           <a:prstGeom prst="rect">
             <a:avLst/>
@@ -1319,8 +1359,8 @@
         </p:nvSpPr>
         <p:spPr>
           <a:xfrm>
-            <a:off x="6492240" y="4434840"/>
-            <a:ext cx="5303520" cy="292608"/>
+            <a:off x="6492240" y="4288536"/>
+            <a:ext cx="5303520" cy="274320"/>
           </a:xfrm>
           <a:prstGeom prst="rect">
             <a:avLst/>
@@ -1336,7 +1376,7 @@
               <a:buNone/>
             </a:pPr>
             <a:r>
-              <a:rPr lang="en-US" sz="1300" b="1" dirty="0">
+              <a:rPr lang="en-US" sz="1200" b="1" dirty="0">
                 <a:solidFill>
                   <a:srgbClr val="E8A838"/>
                 </a:solidFill>
@@ -1346,7 +1386,7 @@
               </a:rPr>
               <a:t>Bottom Line</a:t>
             </a:r>
-            <a:endParaRPr lang="en-US" sz="1300" dirty="0"/>
+            <a:endParaRPr lang="en-US" sz="1200" dirty="0"/>
           </a:p>
         </p:txBody>
       </p:sp>
@@ -1358,8 +1398,8 @@
         </p:nvSpPr>
         <p:spPr>
           <a:xfrm>
-            <a:off x="6492240" y="4782312"/>
-            <a:ext cx="5303520" cy="1783080"/>
+            <a:off x="6492240" y="4581144"/>
+            <a:ext cx="5303520" cy="2148840"/>
           </a:xfrm>
           <a:prstGeom prst="rect">
             <a:avLst/>
@@ -1371,15 +1411,15 @@
           <a:bodyPr wrap="square" lIns="0" tIns="0" rIns="0" bIns="0" rtlCol="0" anchor="ctr"/>
           <a:lstStyle/>
           <a:p>
-            <a:pPr marL="177800" indent="-177800">
+            <a:pPr marL="152400" indent="-152400">
               <a:spcAft>
-                <a:spcPts val="200"/>
+                <a:spcPts val="100"/>
               </a:spcAft>
               <a:buSzPct val="100000"/>
               <a:buChar char="■"/>
             </a:pPr>
             <a:r>
-              <a:rPr lang="en-US" sz="1100" b="1" dirty="0">
+              <a:rPr lang="en-US" sz="1000" b="1" dirty="0">
                 <a:solidFill>
                   <a:srgbClr val="FFFFFF"/>
                 </a:solidFill>
@@ -1387,10 +1427,10 @@
                 <a:ea typeface="Calibri" pitchFamily="34" charset="-122"/>
                 <a:cs typeface="Calibri" pitchFamily="34" charset="-120"/>
               </a:rPr>
-              <a:t>Migration accelerates with time. </a:t>
-            </a:r>
-            <a:r>
-              <a:rPr lang="en-US" sz="1100" dirty="0">
+              <a:t>FISCUs migrate faster than FCUs </a:t>
+            </a:r>
+            <a:r>
+              <a:rPr lang="en-US" sz="1000" dirty="0">
                 <a:solidFill>
                   <a:srgbClr val="CADCFC"/>
                 </a:solidFill>
@@ -1398,28 +1438,28 @@
                 <a:ea typeface="Calibri" pitchFamily="34" charset="-122"/>
                 <a:cs typeface="Calibri" pitchFamily="34" charset="-120"/>
               </a:rPr>
-              <a:t>What looks stable at 1 year reveals dramatic shifts by year 5.</a:t>
-            </a:r>
-            <a:endParaRPr lang="en-US" sz="1100" dirty="0"/>
+              <a:t>— particularly at the $1B threshold, where the system is concentrating into larger institutions more rapidly.</a:t>
+            </a:r>
+            <a:endParaRPr lang="en-US" sz="1000" dirty="0"/>
           </a:p>
           <a:p>
             <a:pPr marL="0" indent="0">
               <a:spcAft>
-                <a:spcPts val="200"/>
+                <a:spcPts val="100"/>
               </a:spcAft>
               <a:buNone/>
             </a:pPr>
-            <a:endParaRPr lang="en-US" sz="1100" dirty="0"/>
+            <a:endParaRPr lang="en-US" sz="1000" dirty="0"/>
           </a:p>
           <a:p>
             <a:pPr marL="0" indent="0">
               <a:spcAft>
-                <a:spcPts val="200"/>
+                <a:spcPts val="100"/>
               </a:spcAft>
               <a:buNone/>
             </a:pPr>
             <a:r>
-              <a:rPr lang="en-US" sz="1100" b="1" dirty="0">
+              <a:rPr lang="en-US" sz="1000" b="1" dirty="0">
                 <a:solidFill>
                   <a:srgbClr val="FFFFFF"/>
                 </a:solidFill>
@@ -1427,10 +1467,10 @@
                 <a:ea typeface="Calibri" pitchFamily="34" charset="-122"/>
                 <a:cs typeface="Calibri" pitchFamily="34" charset="-120"/>
               </a:rPr>
-              <a:t>Mid-range categories drive transformation. </a:t>
-            </a:r>
-            <a:r>
-              <a:rPr lang="en-US" sz="1100" dirty="0">
+              <a:t>The $10B crossing is more pronounced </a:t>
+            </a:r>
+            <a:r>
+              <a:rPr lang="en-US" sz="1000" dirty="0">
                 <a:solidFill>
                   <a:srgbClr val="CADCFC"/>
                 </a:solidFill>
@@ -1438,28 +1478,28 @@
                 <a:ea typeface="Calibri" pitchFamily="34" charset="-122"/>
                 <a:cs typeface="Calibri" pitchFamily="34" charset="-120"/>
               </a:rPr>
-              <a:t>Categories 3–5 are where movement happens; the extremes stay put.</a:t>
-            </a:r>
-            <a:endParaRPr lang="en-US" sz="1100" dirty="0"/>
+              <a:t>— more FISCUs proportionally are approaching the Dodd-Frank supervisory cliff.</a:t>
+            </a:r>
+            <a:endParaRPr lang="en-US" sz="1000" dirty="0"/>
           </a:p>
           <a:p>
             <a:pPr marL="0" indent="0">
               <a:spcAft>
-                <a:spcPts val="200"/>
+                <a:spcPts val="100"/>
               </a:spcAft>
               <a:buNone/>
             </a:pPr>
-            <a:endParaRPr lang="en-US" sz="1100" dirty="0"/>
+            <a:endParaRPr lang="en-US" sz="1000" dirty="0"/>
           </a:p>
           <a:p>
             <a:pPr marL="0" indent="0">
               <a:spcAft>
-                <a:spcPts val="200"/>
+                <a:spcPts val="100"/>
               </a:spcAft>
               <a:buNone/>
             </a:pPr>
             <a:r>
-              <a:rPr lang="en-US" sz="1100" b="1" dirty="0">
+              <a:rPr lang="en-US" sz="1000" b="1" dirty="0">
                 <a:solidFill>
                   <a:srgbClr val="FFFFFF"/>
                 </a:solidFill>
@@ -1467,10 +1507,10 @@
                 <a:ea typeface="Calibri" pitchFamily="34" charset="-122"/>
                 <a:cs typeface="Calibri" pitchFamily="34" charset="-120"/>
               </a:rPr>
-              <a:t>Every flow is upward. </a:t>
-            </a:r>
-            <a:r>
-              <a:rPr lang="en-US" sz="1100" dirty="0">
+              <a:t>Downward migration is real but small </a:t>
+            </a:r>
+            <a:r>
+              <a:rPr lang="en-US" sz="1000" dirty="0">
                 <a:solidFill>
                   <a:srgbClr val="CADCFC"/>
                 </a:solidFill>
@@ -1478,9 +1518,49 @@
                 <a:ea typeface="Calibri" pitchFamily="34" charset="-122"/>
                 <a:cs typeface="Calibri" pitchFamily="34" charset="-120"/>
               </a:rPr>
-              <a:t>The FCU system is not shrinking — it is concentrating into fewer, larger institutions.</a:t>
-            </a:r>
-            <a:endParaRPr lang="en-US" sz="1100" dirty="0"/>
+              <a:t>— 1–2% of small FISCUs face genuine shrinkage risk, a pattern not seen on the federal side.</a:t>
+            </a:r>
+            <a:endParaRPr lang="en-US" sz="1000" dirty="0"/>
+          </a:p>
+          <a:p>
+            <a:pPr marL="0" indent="0">
+              <a:spcAft>
+                <a:spcPts val="100"/>
+              </a:spcAft>
+              <a:buNone/>
+            </a:pPr>
+            <a:endParaRPr lang="en-US" sz="1000" dirty="0"/>
+          </a:p>
+          <a:p>
+            <a:pPr marL="0" indent="0">
+              <a:spcAft>
+                <a:spcPts val="100"/>
+              </a:spcAft>
+              <a:buNone/>
+            </a:pPr>
+            <a:r>
+              <a:rPr lang="en-US" sz="1000" b="1" dirty="0">
+                <a:solidFill>
+                  <a:srgbClr val="E8A838"/>
+                </a:solidFill>
+                <a:latin typeface="Calibri" pitchFamily="34" charset="0"/>
+                <a:ea typeface="Calibri" pitchFamily="34" charset="-122"/>
+                <a:cs typeface="Calibri" pitchFamily="34" charset="-120"/>
+              </a:rPr>
+              <a:t>Why faster? </a:t>
+            </a:r>
+            <a:r>
+              <a:rPr lang="en-US" sz="1000" i="1" dirty="0">
+                <a:solidFill>
+                  <a:srgbClr val="CADCFC"/>
+                </a:solidFill>
+                <a:latin typeface="Calibri" pitchFamily="34" charset="0"/>
+                <a:ea typeface="Calibri" pitchFamily="34" charset="-122"/>
+                <a:cs typeface="Calibri" pitchFamily="34" charset="-120"/>
+              </a:rPr>
+              <a:t>State charters typically operate under more flexible regulatory frameworks and field-of-membership rules, allowing FISCUs to expand membership, products, and geographic reach more aggressively — which translates into faster asset growth.</a:t>
+            </a:r>
+            <a:endParaRPr lang="en-US" sz="1000" dirty="0"/>
           </a:p>
         </p:txBody>
       </p:sp>
@@ -1492,8 +1572,8 @@
         </p:nvSpPr>
         <p:spPr>
           <a:xfrm>
-            <a:off x="365760" y="6583680"/>
-            <a:ext cx="11430000" cy="228600"/>
+            <a:off x="365760" y="6629400"/>
+            <a:ext cx="11430000" cy="182880"/>
           </a:xfrm>
           <a:prstGeom prst="rect">
             <a:avLst/>
@@ -1517,7 +1597,7 @@
                 <a:ea typeface="Calibri" pitchFamily="34" charset="-122"/>
                 <a:cs typeface="Calibri" pitchFamily="34" charset="-120"/>
               </a:rPr>
-              <a:t>Source: NCUA Call Reports  |  Individual ARIMA forecasts of 2,713 active FCUs as of 2025 Q3</a:t>
+              <a:t>Source: NCUA Call Reports  |  Individual ARIMA forecasts of 1,613 active FISCUs as of 2025 Q3</a:t>
             </a:r>
             <a:endParaRPr lang="en-US" sz="900" dirty="0"/>
           </a:p>

--- a/Matrix1.pptx
+++ b/Matrix1.pptx
@@ -137,7 +137,7 @@
     </p:spTree>
     <p:extLst>
       <p:ext uri="{BB962C8B-B14F-4D97-AF65-F5344CB8AC3E}">
-        <p14:creationId xmlns:p14="http://schemas.microsoft.com/office/powerpoint/2010/main" val="643832312"/>
+        <p14:creationId xmlns:p14="http://schemas.microsoft.com/office/powerpoint/2010/main" val="2908007459"/>
       </p:ext>
     </p:extLst>
   </p:cSld>
@@ -667,7 +667,7 @@
         <p:spPr>
           <a:xfrm>
             <a:off x="365760" y="228600"/>
-            <a:ext cx="11430000" cy="548640"/>
+            <a:ext cx="11430000" cy="502920"/>
           </a:xfrm>
           <a:prstGeom prst="rect">
             <a:avLst/>
@@ -683,7 +683,7 @@
               <a:buNone/>
             </a:pPr>
             <a:r>
-              <a:rPr lang="en-US" sz="2600" b="1" dirty="0">
+              <a:rPr lang="en-US" sz="2400" b="1" dirty="0">
                 <a:solidFill>
                   <a:srgbClr val="0B1D3A"/>
                 </a:solidFill>
@@ -691,9 +691,9 @@
                 <a:ea typeface="Calibri" pitchFamily="34" charset="-122"/>
                 <a:cs typeface="Calibri" pitchFamily="34" charset="-120"/>
               </a:rPr>
-              <a:t>FISCU Transition Evolution — Tracking Categories Across 1, 3, and 5 Years</a:t>
-            </a:r>
-            <a:endParaRPr lang="en-US" sz="2600" dirty="0"/>
+              <a:t>Category Migration by State — FCU vs FISCU Geographic Patterns</a:t>
+            </a:r>
+            <a:endParaRPr lang="en-US" sz="2400" dirty="0"/>
           </a:p>
         </p:txBody>
       </p:sp>
@@ -705,7 +705,7 @@
         </p:nvSpPr>
         <p:spPr>
           <a:xfrm>
-            <a:off x="365760" y="777240"/>
+            <a:off x="365760" y="713232"/>
             <a:ext cx="11430000" cy="274320"/>
           </a:xfrm>
           <a:prstGeom prst="rect">
@@ -722,7 +722,7 @@
               <a:buNone/>
             </a:pPr>
             <a:r>
-              <a:rPr lang="en-US" sz="1200" i="1" dirty="0">
+              <a:rPr lang="en-US" sz="1100" i="1" dirty="0">
                 <a:solidFill>
                   <a:srgbClr val="666666"/>
                 </a:solidFill>
@@ -730,9 +730,9 @@
                 <a:ea typeface="Calibri" pitchFamily="34" charset="-122"/>
                 <a:cs typeface="Calibri" pitchFamily="34" charset="-120"/>
               </a:rPr>
-              <a:t>Rows = current category  |  Columns = projected category  |  Dark diagonal cells = CUs that stay put</a:t>
-            </a:r>
-            <a:endParaRPr lang="en-US" sz="1200" dirty="0"/>
+              <a:t>Top 20 states by CU count  |  Share of CUs projected to move up, stay, or move down over 5 years  |  States ranked by number of CUs moving up</a:t>
+            </a:r>
+            <a:endParaRPr lang="en-US" sz="1100" dirty="0"/>
           </a:p>
         </p:txBody>
       </p:sp>
@@ -744,8 +744,8 @@
         </p:nvSpPr>
         <p:spPr>
           <a:xfrm>
-            <a:off x="365760" y="1097280"/>
-            <a:ext cx="3749040" cy="274320"/>
+            <a:off x="365760" y="1005840"/>
+            <a:ext cx="5715000" cy="256032"/>
           </a:xfrm>
           <a:prstGeom prst="rect">
             <a:avLst/>
@@ -769,7 +769,7 @@
                 <a:ea typeface="Calibri" pitchFamily="34" charset="-122"/>
                 <a:cs typeface="Calibri" pitchFamily="34" charset="-120"/>
               </a:rPr>
-              <a:t>1 Year Out</a:t>
+              <a:t>FCU — Top 20 States</a:t>
             </a:r>
             <a:endParaRPr lang="en-US" sz="1300" dirty="0"/>
           </a:p>
@@ -783,8 +783,8 @@
         </p:nvSpPr>
         <p:spPr>
           <a:xfrm>
-            <a:off x="365760" y="1417320"/>
-            <a:ext cx="3749040" cy="2240280"/>
+            <a:off x="365760" y="1280160"/>
+            <a:ext cx="5715000" cy="2743200"/>
           </a:xfrm>
           <a:prstGeom prst="rect">
             <a:avLst/>
@@ -815,8 +815,8 @@
         </p:nvSpPr>
         <p:spPr>
           <a:xfrm>
-            <a:off x="365760" y="2354580"/>
-            <a:ext cx="3749040" cy="365760"/>
+            <a:off x="365760" y="2468880"/>
+            <a:ext cx="5715000" cy="365760"/>
           </a:xfrm>
           <a:prstGeom prst="rect">
             <a:avLst/>
@@ -840,7 +840,7 @@
                 <a:ea typeface="Calibri" pitchFamily="34" charset="-122"/>
                 <a:cs typeface="Calibri" pitchFamily="34" charset="-120"/>
               </a:rPr>
-              <a:t>[ Insert FISCU matrix chart here ]</a:t>
+              <a:t>[ Insert FCU State Migration chart ]</a:t>
             </a:r>
             <a:endParaRPr lang="en-US" sz="1100" dirty="0"/>
           </a:p>
@@ -854,8 +854,8 @@
         </p:nvSpPr>
         <p:spPr>
           <a:xfrm>
-            <a:off x="4297680" y="1097280"/>
-            <a:ext cx="3749040" cy="274320"/>
+            <a:off x="6263640" y="1005840"/>
+            <a:ext cx="5715000" cy="256032"/>
           </a:xfrm>
           <a:prstGeom prst="rect">
             <a:avLst/>
@@ -879,7 +879,7 @@
                 <a:ea typeface="Calibri" pitchFamily="34" charset="-122"/>
                 <a:cs typeface="Calibri" pitchFamily="34" charset="-120"/>
               </a:rPr>
-              <a:t>3 Years Out</a:t>
+              <a:t>FISCU — Top 20 States</a:t>
             </a:r>
             <a:endParaRPr lang="en-US" sz="1300" dirty="0"/>
           </a:p>
@@ -893,8 +893,8 @@
         </p:nvSpPr>
         <p:spPr>
           <a:xfrm>
-            <a:off x="4297680" y="1417320"/>
-            <a:ext cx="3749040" cy="2240280"/>
+            <a:off x="6263640" y="1280160"/>
+            <a:ext cx="5715000" cy="2743200"/>
           </a:xfrm>
           <a:prstGeom prst="rect">
             <a:avLst/>
@@ -925,8 +925,8 @@
         </p:nvSpPr>
         <p:spPr>
           <a:xfrm>
-            <a:off x="4297680" y="2354580"/>
-            <a:ext cx="3749040" cy="365760"/>
+            <a:off x="6263640" y="2468880"/>
+            <a:ext cx="5715000" cy="365760"/>
           </a:xfrm>
           <a:prstGeom prst="rect">
             <a:avLst/>
@@ -950,7 +950,7 @@
                 <a:ea typeface="Calibri" pitchFamily="34" charset="-122"/>
                 <a:cs typeface="Calibri" pitchFamily="34" charset="-120"/>
               </a:rPr>
-              <a:t>[ Insert FISCU matrix chart here ]</a:t>
+              <a:t>[ Insert FISCU State Migration chart ]</a:t>
             </a:r>
             <a:endParaRPr lang="en-US" sz="1100" dirty="0"/>
           </a:p>
@@ -964,8 +964,8 @@
         </p:nvSpPr>
         <p:spPr>
           <a:xfrm>
-            <a:off x="8229600" y="1097280"/>
-            <a:ext cx="3749040" cy="274320"/>
+            <a:off x="365760" y="4059936"/>
+            <a:ext cx="11430000" cy="228600"/>
           </a:xfrm>
           <a:prstGeom prst="rect">
             <a:avLst/>
@@ -981,49 +981,78 @@
               <a:buNone/>
             </a:pPr>
             <a:r>
-              <a:rPr lang="en-US" sz="1300" b="1" dirty="0">
-                <a:solidFill>
-                  <a:srgbClr val="0B1D3A"/>
-                </a:solidFill>
-                <a:latin typeface="Calibri" pitchFamily="34" charset="0"/>
-                <a:ea typeface="Calibri" pitchFamily="34" charset="-122"/>
-                <a:cs typeface="Calibri" pitchFamily="34" charset="-120"/>
-              </a:rPr>
-              <a:t>5 Years Out</a:t>
-            </a:r>
-            <a:endParaRPr lang="en-US" sz="1300" dirty="0"/>
+              <a:rPr lang="en-US" sz="1000" b="1" dirty="0">
+                <a:solidFill>
+                  <a:srgbClr val="52B788"/>
+                </a:solidFill>
+                <a:latin typeface="Calibri" pitchFamily="34" charset="0"/>
+                <a:ea typeface="Calibri" pitchFamily="34" charset="-122"/>
+                <a:cs typeface="Calibri" pitchFamily="34" charset="-120"/>
+              </a:rPr>
+              <a:t>Green = Moved Up   </a:t>
+            </a:r>
+            <a:r>
+              <a:rPr lang="en-US" sz="1000" b="1" dirty="0">
+                <a:solidFill>
+                  <a:srgbClr val="5B9BD5"/>
+                </a:solidFill>
+                <a:latin typeface="Calibri" pitchFamily="34" charset="0"/>
+                <a:ea typeface="Calibri" pitchFamily="34" charset="-122"/>
+                <a:cs typeface="Calibri" pitchFamily="34" charset="-120"/>
+              </a:rPr>
+              <a:t>Blue = Same Category   </a:t>
+            </a:r>
+            <a:r>
+              <a:rPr lang="en-US" sz="1000" b="1" dirty="0">
+                <a:solidFill>
+                  <a:srgbClr val="E76F51"/>
+                </a:solidFill>
+                <a:latin typeface="Calibri" pitchFamily="34" charset="0"/>
+                <a:ea typeface="Calibri" pitchFamily="34" charset="-122"/>
+                <a:cs typeface="Calibri" pitchFamily="34" charset="-120"/>
+              </a:rPr>
+              <a:t>Coral = Moved Down</a:t>
+            </a:r>
+            <a:endParaRPr lang="en-US" sz="1000" dirty="0"/>
           </a:p>
         </p:txBody>
       </p:sp>
       <p:sp>
         <p:nvSpPr>
-          <p:cNvPr id="11" name="Shape 9"/>
+          <p:cNvPr id="11" name="Text 9"/>
           <p:cNvSpPr/>
           <p:nvPr/>
         </p:nvSpPr>
         <p:spPr>
           <a:xfrm>
-            <a:off x="8229600" y="1417320"/>
-            <a:ext cx="3749040" cy="2240280"/>
+            <a:off x="365760" y="4434840"/>
+            <a:ext cx="11430000" cy="256032"/>
           </a:xfrm>
           <a:prstGeom prst="rect">
             <a:avLst/>
           </a:prstGeom>
-          <a:solidFill>
-            <a:srgbClr val="F8F9FB"/>
-          </a:solidFill>
-          <a:ln w="12700">
-            <a:solidFill>
-              <a:srgbClr val="CADCFC"/>
-            </a:solidFill>
-            <a:prstDash val="dash"/>
-          </a:ln>
+          <a:noFill/>
+          <a:ln/>
         </p:spPr>
         <p:txBody>
-          <a:bodyPr/>
+          <a:bodyPr wrap="square" lIns="0" tIns="0" rIns="0" bIns="0" rtlCol="0" anchor="ctr"/>
           <a:lstStyle/>
           <a:p>
-            <a:endParaRPr lang="en-US"/>
+            <a:pPr marL="0" indent="0">
+              <a:buNone/>
+            </a:pPr>
+            <a:r>
+              <a:rPr lang="en-US" sz="1400" b="1" dirty="0">
+                <a:solidFill>
+                  <a:srgbClr val="0B1D3A"/>
+                </a:solidFill>
+                <a:latin typeface="Calibri" pitchFamily="34" charset="0"/>
+                <a:ea typeface="Calibri" pitchFamily="34" charset="-122"/>
+                <a:cs typeface="Calibri" pitchFamily="34" charset="-120"/>
+              </a:rPr>
+              <a:t>Observations</a:t>
+            </a:r>
+            <a:endParaRPr lang="en-US" sz="1400" dirty="0"/>
           </a:p>
         </p:txBody>
       </p:sp>
@@ -1035,8 +1064,8 @@
         </p:nvSpPr>
         <p:spPr>
           <a:xfrm>
-            <a:off x="8229600" y="2354580"/>
-            <a:ext cx="3749040" cy="365760"/>
+            <a:off x="365760" y="4727448"/>
+            <a:ext cx="5715000" cy="256032"/>
           </a:xfrm>
           <a:prstGeom prst="rect">
             <a:avLst/>
@@ -1048,21 +1077,21 @@
           <a:bodyPr wrap="square" lIns="0" tIns="0" rIns="0" bIns="0" rtlCol="0" anchor="ctr"/>
           <a:lstStyle/>
           <a:p>
-            <a:pPr marL="0" indent="0" algn="ctr">
+            <a:pPr marL="0" indent="0">
               <a:buNone/>
             </a:pPr>
             <a:r>
-              <a:rPr lang="en-US" sz="1100" i="1" dirty="0">
-                <a:solidFill>
-                  <a:srgbClr val="666666"/>
-                </a:solidFill>
-                <a:latin typeface="Calibri" pitchFamily="34" charset="0"/>
-                <a:ea typeface="Calibri" pitchFamily="34" charset="-122"/>
-                <a:cs typeface="Calibri" pitchFamily="34" charset="-120"/>
-              </a:rPr>
-              <a:t>[ Insert FISCU matrix chart here ]</a:t>
-            </a:r>
-            <a:endParaRPr lang="en-US" sz="1100" dirty="0"/>
+              <a:rPr lang="en-US" sz="1200" b="1" dirty="0">
+                <a:solidFill>
+                  <a:srgbClr val="5B9BD5"/>
+                </a:solidFill>
+                <a:latin typeface="Calibri" pitchFamily="34" charset="0"/>
+                <a:ea typeface="Calibri" pitchFamily="34" charset="-122"/>
+                <a:cs typeface="Calibri" pitchFamily="34" charset="-120"/>
+              </a:rPr>
+              <a:t>FCU — Concentration in Largest States</a:t>
+            </a:r>
+            <a:endParaRPr lang="en-US" sz="1200" dirty="0"/>
           </a:p>
         </p:txBody>
       </p:sp>
@@ -1074,8 +1103,8 @@
         </p:nvSpPr>
         <p:spPr>
           <a:xfrm>
-            <a:off x="365760" y="3886200"/>
-            <a:ext cx="11430000" cy="274320"/>
+            <a:off x="365760" y="5001768"/>
+            <a:ext cx="5715000" cy="1463040"/>
           </a:xfrm>
           <a:prstGeom prst="rect">
             <a:avLst/>
@@ -1087,11 +1116,66 @@
           <a:bodyPr wrap="square" lIns="0" tIns="0" rIns="0" bIns="0" rtlCol="0" anchor="ctr"/>
           <a:lstStyle/>
           <a:p>
+            <a:pPr marL="152400" indent="-152400">
+              <a:spcAft>
+                <a:spcPts val="100"/>
+              </a:spcAft>
+              <a:buSzPct val="100000"/>
+              <a:buChar char="■"/>
+            </a:pPr>
+            <a:r>
+              <a:rPr lang="en-US" sz="1000" dirty="0">
+                <a:solidFill>
+                  <a:srgbClr val="333333"/>
+                </a:solidFill>
+                <a:latin typeface="Calibri" pitchFamily="34" charset="0"/>
+                <a:ea typeface="Calibri" pitchFamily="34" charset="-122"/>
+                <a:cs typeface="Calibri" pitchFamily="34" charset="-120"/>
+              </a:rPr>
+              <a:t>The dominant pattern is </a:t>
+            </a:r>
+            <a:r>
+              <a:rPr lang="en-US" sz="1000" b="1" dirty="0">
+                <a:solidFill>
+                  <a:srgbClr val="333333"/>
+                </a:solidFill>
+                <a:latin typeface="Calibri" pitchFamily="34" charset="0"/>
+                <a:ea typeface="Calibri" pitchFamily="34" charset="-122"/>
+                <a:cs typeface="Calibri" pitchFamily="34" charset="-120"/>
+              </a:rPr>
+              <a:t>stability</a:t>
+            </a:r>
+            <a:r>
+              <a:rPr lang="en-US" sz="1000" dirty="0">
+                <a:solidFill>
+                  <a:srgbClr val="333333"/>
+                </a:solidFill>
+                <a:latin typeface="Calibri" pitchFamily="34" charset="0"/>
+                <a:ea typeface="Calibri" pitchFamily="34" charset="-122"/>
+                <a:cs typeface="Calibri" pitchFamily="34" charset="-120"/>
+              </a:rPr>
+              <a:t> — the blue "Same Category" segment averages around 80%. Roughly 4 of 5 FCUs remain in their current size category over 5 years.</a:t>
+            </a:r>
+            <a:endParaRPr lang="en-US" sz="1000" dirty="0"/>
+          </a:p>
+          <a:p>
             <a:pPr marL="0" indent="0">
+              <a:spcAft>
+                <a:spcPts val="100"/>
+              </a:spcAft>
               <a:buNone/>
             </a:pPr>
-            <a:r>
-              <a:rPr lang="en-US" sz="1400" b="1" dirty="0">
+            <a:endParaRPr lang="en-US" sz="1000" dirty="0"/>
+          </a:p>
+          <a:p>
+            <a:pPr marL="0" indent="0">
+              <a:spcAft>
+                <a:spcPts val="100"/>
+              </a:spcAft>
+              <a:buNone/>
+            </a:pPr>
+            <a:r>
+              <a:rPr lang="en-US" sz="1000" b="1" dirty="0">
                 <a:solidFill>
                   <a:srgbClr val="0B1D3A"/>
                 </a:solidFill>
@@ -1099,9 +1183,104 @@
                 <a:ea typeface="Calibri" pitchFamily="34" charset="-122"/>
                 <a:cs typeface="Calibri" pitchFamily="34" charset="-120"/>
               </a:rPr>
-              <a:t>Tracking each category's evolution over time:</a:t>
-            </a:r>
-            <a:endParaRPr lang="en-US" sz="1400" dirty="0"/>
+              <a:t>NY leads </a:t>
+            </a:r>
+            <a:r>
+              <a:rPr lang="en-US" sz="1000" dirty="0">
+                <a:solidFill>
+                  <a:srgbClr val="333333"/>
+                </a:solidFill>
+                <a:latin typeface="Calibri" pitchFamily="34" charset="0"/>
+                <a:ea typeface="Calibri" pitchFamily="34" charset="-122"/>
+                <a:cs typeface="Calibri" pitchFamily="34" charset="-120"/>
+              </a:rPr>
+              <a:t>in absolute upward mobility — 51 FCUs (20% of 260) move up. </a:t>
+            </a:r>
+            <a:r>
+              <a:rPr lang="en-US" sz="1000" b="1" dirty="0">
+                <a:solidFill>
+                  <a:srgbClr val="0B1D3A"/>
+                </a:solidFill>
+                <a:latin typeface="Calibri" pitchFamily="34" charset="0"/>
+                <a:ea typeface="Calibri" pitchFamily="34" charset="-122"/>
+                <a:cs typeface="Calibri" pitchFamily="34" charset="-120"/>
+              </a:rPr>
+              <a:t>TX </a:t>
+            </a:r>
+            <a:r>
+              <a:rPr lang="en-US" sz="1000" dirty="0">
+                <a:solidFill>
+                  <a:srgbClr val="333333"/>
+                </a:solidFill>
+                <a:latin typeface="Calibri" pitchFamily="34" charset="0"/>
+                <a:ea typeface="Calibri" pitchFamily="34" charset="-122"/>
+                <a:cs typeface="Calibri" pitchFamily="34" charset="-120"/>
+              </a:rPr>
+              <a:t>follows with 34 (15%), then </a:t>
+            </a:r>
+            <a:r>
+              <a:rPr lang="en-US" sz="1000" b="1" dirty="0">
+                <a:solidFill>
+                  <a:srgbClr val="0B1D3A"/>
+                </a:solidFill>
+                <a:latin typeface="Calibri" pitchFamily="34" charset="0"/>
+                <a:ea typeface="Calibri" pitchFamily="34" charset="-122"/>
+                <a:cs typeface="Calibri" pitchFamily="34" charset="-120"/>
+              </a:rPr>
+              <a:t>CA </a:t>
+            </a:r>
+            <a:r>
+              <a:rPr lang="en-US" sz="1000" dirty="0">
+                <a:solidFill>
+                  <a:srgbClr val="333333"/>
+                </a:solidFill>
+                <a:latin typeface="Calibri" pitchFamily="34" charset="0"/>
+                <a:ea typeface="Calibri" pitchFamily="34" charset="-122"/>
+                <a:cs typeface="Calibri" pitchFamily="34" charset="-120"/>
+              </a:rPr>
+              <a:t>with 28 (20%).</a:t>
+            </a:r>
+            <a:endParaRPr lang="en-US" sz="1000" dirty="0"/>
+          </a:p>
+          <a:p>
+            <a:pPr marL="0" indent="0">
+              <a:spcAft>
+                <a:spcPts val="100"/>
+              </a:spcAft>
+              <a:buNone/>
+            </a:pPr>
+            <a:endParaRPr lang="en-US" sz="1000" dirty="0"/>
+          </a:p>
+          <a:p>
+            <a:pPr marL="0" indent="0">
+              <a:spcAft>
+                <a:spcPts val="100"/>
+              </a:spcAft>
+              <a:buNone/>
+            </a:pPr>
+            <a:r>
+              <a:rPr lang="en-US" sz="1000" b="1" dirty="0">
+                <a:solidFill>
+                  <a:srgbClr val="333333"/>
+                </a:solidFill>
+                <a:latin typeface="Calibri" pitchFamily="34" charset="0"/>
+                <a:ea typeface="Calibri" pitchFamily="34" charset="-122"/>
+                <a:cs typeface="Calibri" pitchFamily="34" charset="-120"/>
+              </a:rPr>
+              <a:t>Growth concentrates in the largest states </a:t>
+            </a:r>
+            <a:r>
+              <a:rPr lang="en-US" sz="1000" dirty="0">
+                <a:solidFill>
+                  <a:srgbClr val="333333"/>
+                </a:solidFill>
+                <a:latin typeface="Calibri" pitchFamily="34" charset="0"/>
+                <a:ea typeface="Calibri" pitchFamily="34" charset="-122"/>
+                <a:cs typeface="Calibri" pitchFamily="34" charset="-120"/>
+              </a:rPr>
+              <a:t>— not just proportionally, but in raw numbers.</a:t>
+            </a:r>
+            <a:endParaRPr lang="en-US" sz="1000" dirty="0"/>
           </a:p>
         </p:txBody>
       </p:sp>
@@ -1113,8 +1292,8 @@
         </p:nvSpPr>
         <p:spPr>
           <a:xfrm>
-            <a:off x="365760" y="4197096"/>
-            <a:ext cx="5760720" cy="2606040"/>
+            <a:off x="6263640" y="4727448"/>
+            <a:ext cx="5715000" cy="256032"/>
           </a:xfrm>
           <a:prstGeom prst="rect">
             <a:avLst/>
@@ -1126,6 +1305,45 @@
           <a:bodyPr wrap="square" lIns="0" tIns="0" rIns="0" bIns="0" rtlCol="0" anchor="ctr"/>
           <a:lstStyle/>
           <a:p>
+            <a:pPr marL="0" indent="0">
+              <a:buNone/>
+            </a:pPr>
+            <a:r>
+              <a:rPr lang="en-US" sz="1200" b="1" dirty="0">
+                <a:solidFill>
+                  <a:srgbClr val="2EC4B6"/>
+                </a:solidFill>
+                <a:latin typeface="Calibri" pitchFamily="34" charset="0"/>
+                <a:ea typeface="Calibri" pitchFamily="34" charset="-122"/>
+                <a:cs typeface="Calibri" pitchFamily="34" charset="-120"/>
+              </a:rPr>
+              <a:t>FISCU — Midwest-Driven Growth</a:t>
+            </a:r>
+            <a:endParaRPr lang="en-US" sz="1200" dirty="0"/>
+          </a:p>
+        </p:txBody>
+      </p:sp>
+      <p:sp>
+        <p:nvSpPr>
+          <p:cNvPr id="15" name="Text 13"/>
+          <p:cNvSpPr/>
+          <p:nvPr/>
+        </p:nvSpPr>
+        <p:spPr>
+          <a:xfrm>
+            <a:off x="6263640" y="5001768"/>
+            <a:ext cx="5715000" cy="1463040"/>
+          </a:xfrm>
+          <a:prstGeom prst="rect">
+            <a:avLst/>
+          </a:prstGeom>
+          <a:noFill/>
+          <a:ln/>
+        </p:spPr>
+        <p:txBody>
+          <a:bodyPr wrap="square" lIns="0" tIns="0" rIns="0" bIns="0" rtlCol="0" anchor="ctr"/>
+          <a:lstStyle/>
+          <a:p>
             <a:pPr marL="152400" indent="-152400">
               <a:spcAft>
                 <a:spcPts val="100"/>
@@ -1136,13 +1354,24 @@
             <a:r>
               <a:rPr lang="en-US" sz="1000" b="1" dirty="0">
                 <a:solidFill>
-                  <a:srgbClr val="2EC4B6"/>
-                </a:solidFill>
-                <a:latin typeface="Calibri" pitchFamily="34" charset="0"/>
-                <a:ea typeface="Calibri" pitchFamily="34" charset="-122"/>
-                <a:cs typeface="Calibri" pitchFamily="34" charset="-120"/>
-              </a:rPr>
-              <a:t>Category 5 ($500M–$1B)</a:t>
+                  <a:srgbClr val="333333"/>
+                </a:solidFill>
+                <a:latin typeface="Calibri" pitchFamily="34" charset="0"/>
+                <a:ea typeface="Calibri" pitchFamily="34" charset="-122"/>
+                <a:cs typeface="Calibri" pitchFamily="34" charset="-120"/>
+              </a:rPr>
+              <a:t>Different geographical pattern. </a:t>
+            </a:r>
+            <a:r>
+              <a:rPr lang="en-US" sz="1000" b="1" dirty="0">
+                <a:solidFill>
+                  <a:srgbClr val="0B1D3A"/>
+                </a:solidFill>
+                <a:latin typeface="Calibri" pitchFamily="34" charset="0"/>
+                <a:ea typeface="Calibri" pitchFamily="34" charset="-122"/>
+                <a:cs typeface="Calibri" pitchFamily="34" charset="-120"/>
+              </a:rPr>
+              <a:t>WI leads </a:t>
             </a:r>
             <a:r>
               <a:rPr lang="en-US" sz="1000" dirty="0">
@@ -1153,7 +1382,29 @@
                 <a:ea typeface="Calibri" pitchFamily="34" charset="-122"/>
                 <a:cs typeface="Calibri" pitchFamily="34" charset="-120"/>
               </a:rPr>
-              <a:t> — the standout migration zone. Retention drops 93% → 75% → 58%. 42% of these FISCUs become billion-dollar institutions by year 5.</a:t>
+              <a:t>with 28 FISCUs (28% of 99) — </a:t>
+            </a:r>
+            <a:r>
+              <a:rPr lang="en-US" sz="1000" i="1" dirty="0">
+                <a:solidFill>
+                  <a:srgbClr val="333333"/>
+                </a:solidFill>
+                <a:latin typeface="Calibri" pitchFamily="34" charset="0"/>
+                <a:ea typeface="Calibri" pitchFamily="34" charset="-122"/>
+                <a:cs typeface="Calibri" pitchFamily="34" charset="-120"/>
+              </a:rPr>
+              <a:t>by far the highest</a:t>
+            </a:r>
+            <a:r>
+              <a:rPr lang="en-US" sz="1000" dirty="0">
+                <a:solidFill>
+                  <a:srgbClr val="333333"/>
+                </a:solidFill>
+                <a:latin typeface="Calibri" pitchFamily="34" charset="0"/>
+                <a:ea typeface="Calibri" pitchFamily="34" charset="-122"/>
+                <a:cs typeface="Calibri" pitchFamily="34" charset="-120"/>
+              </a:rPr>
+              <a:t>. MI is second with 26 (23%), followed by IL (18, 13%) and TX (18, 12%).</a:t>
             </a:r>
             <a:endParaRPr lang="en-US" sz="1000" dirty="0"/>
           </a:p>
@@ -1182,7 +1433,7 @@
                 <a:ea typeface="Calibri" pitchFamily="34" charset="-122"/>
                 <a:cs typeface="Calibri" pitchFamily="34" charset="-120"/>
               </a:rPr>
-              <a:t>Category 3 ($50M–$100M)</a:t>
+              <a:t>Alabama stands out</a:t>
             </a:r>
             <a:r>
               <a:rPr lang="en-US" sz="1000" dirty="0">
@@ -1193,7 +1444,7 @@
                 <a:ea typeface="Calibri" pitchFamily="34" charset="-122"/>
                 <a:cs typeface="Calibri" pitchFamily="34" charset="-120"/>
               </a:rPr>
-              <a:t> — accelerating consolidation. Retention drops 93% → 78% → 63%. One in three FISCUs grows past $100M by year 5.</a:t>
+              <a:t> — 3 FISCUs (6%) moving up but also 3 (6%) moving down, the highest downward migration rate in the chart.</a:t>
             </a:r>
             <a:endParaRPr lang="en-US" sz="1000" dirty="0"/>
           </a:p>
@@ -1216,13 +1467,13 @@
             <a:r>
               <a:rPr lang="en-US" sz="1000" b="1" dirty="0">
                 <a:solidFill>
-                  <a:srgbClr val="5B9BD5"/>
-                </a:solidFill>
-                <a:latin typeface="Calibri" pitchFamily="34" charset="0"/>
-                <a:ea typeface="Calibri" pitchFamily="34" charset="-122"/>
-                <a:cs typeface="Calibri" pitchFamily="34" charset="-120"/>
-              </a:rPr>
-              <a:t>Category 6 ($1B–$10B)</a:t>
+                  <a:srgbClr val="333333"/>
+                </a:solidFill>
+                <a:latin typeface="Calibri" pitchFamily="34" charset="0"/>
+                <a:ea typeface="Calibri" pitchFamily="34" charset="-122"/>
+                <a:cs typeface="Calibri" pitchFamily="34" charset="-120"/>
+              </a:rPr>
+              <a:t>Geographic concentration in the Midwest </a:t>
             </a:r>
             <a:r>
               <a:rPr lang="en-US" sz="1000" dirty="0">
@@ -1233,87 +1484,7 @@
                 <a:ea typeface="Calibri" pitchFamily="34" charset="-122"/>
                 <a:cs typeface="Calibri" pitchFamily="34" charset="-120"/>
               </a:rPr>
-              <a:t> — heavier flow toward Dodd-Frank. 23 FISCUs (9%) cross $10B by year 5 — proportionally more than FCUs (7%).</a:t>
-            </a:r>
-            <a:endParaRPr lang="en-US" sz="1000" dirty="0"/>
-          </a:p>
-          <a:p>
-            <a:pPr marL="0" indent="0">
-              <a:spcAft>
-                <a:spcPts val="100"/>
-              </a:spcAft>
-              <a:buNone/>
-            </a:pPr>
-            <a:endParaRPr lang="en-US" sz="1000" dirty="0"/>
-          </a:p>
-          <a:p>
-            <a:pPr marL="0" indent="0">
-              <a:spcAft>
-                <a:spcPts val="100"/>
-              </a:spcAft>
-              <a:buNone/>
-            </a:pPr>
-            <a:r>
-              <a:rPr lang="en-US" sz="1000" b="1" dirty="0">
-                <a:solidFill>
-                  <a:srgbClr val="F4A261"/>
-                </a:solidFill>
-                <a:latin typeface="Calibri" pitchFamily="34" charset="0"/>
-                <a:ea typeface="Calibri" pitchFamily="34" charset="-122"/>
-                <a:cs typeface="Calibri" pitchFamily="34" charset="-120"/>
-              </a:rPr>
-              <a:t>Category 2 ($10M–$50M)</a:t>
-            </a:r>
-            <a:r>
-              <a:rPr lang="en-US" sz="1000" dirty="0">
-                <a:solidFill>
-                  <a:srgbClr val="333333"/>
-                </a:solidFill>
-                <a:latin typeface="Calibri" pitchFamily="34" charset="0"/>
-                <a:ea typeface="Calibri" pitchFamily="34" charset="-122"/>
-                <a:cs typeface="Calibri" pitchFamily="34" charset="-120"/>
-              </a:rPr>
-              <a:t> — small but persistent downward flow. 1–2% drop to Cat 1 at every horizon — a pattern essentially absent in FCUs.</a:t>
-            </a:r>
-            <a:endParaRPr lang="en-US" sz="1000" dirty="0"/>
-          </a:p>
-          <a:p>
-            <a:pPr marL="0" indent="0">
-              <a:spcAft>
-                <a:spcPts val="100"/>
-              </a:spcAft>
-              <a:buNone/>
-            </a:pPr>
-            <a:endParaRPr lang="en-US" sz="1000" dirty="0"/>
-          </a:p>
-          <a:p>
-            <a:pPr marL="0" indent="0">
-              <a:spcAft>
-                <a:spcPts val="100"/>
-              </a:spcAft>
-              <a:buNone/>
-            </a:pPr>
-            <a:r>
-              <a:rPr lang="en-US" sz="1000" b="1" dirty="0">
-                <a:solidFill>
-                  <a:srgbClr val="0B1D3A"/>
-                </a:solidFill>
-                <a:latin typeface="Calibri" pitchFamily="34" charset="0"/>
-                <a:ea typeface="Calibri" pitchFamily="34" charset="-122"/>
-                <a:cs typeface="Calibri" pitchFamily="34" charset="-120"/>
-              </a:rPr>
-              <a:t>Categories 1 and 7</a:t>
-            </a:r>
-            <a:r>
-              <a:rPr lang="en-US" sz="1000" dirty="0">
-                <a:solidFill>
-                  <a:srgbClr val="333333"/>
-                </a:solidFill>
-                <a:latin typeface="Calibri" pitchFamily="34" charset="0"/>
-                <a:ea typeface="Calibri" pitchFamily="34" charset="-122"/>
-                <a:cs typeface="Calibri" pitchFamily="34" charset="-120"/>
-              </a:rPr>
-              <a:t> — the system's anchors. Cat 1 (&lt;$10M): 99% → 99% → 96% retention. Cat 7 ($10B+): 100% retention always.</a:t>
+              <a:t>— WI, MI, and IL account for a sizable share of upward FISCU mobility.</a:t>
             </a:r>
             <a:endParaRPr lang="en-US" sz="1000" dirty="0"/>
           </a:p>
@@ -1321,14 +1492,14 @@
       </p:sp>
       <p:sp>
         <p:nvSpPr>
-          <p:cNvPr id="15" name="Shape 13"/>
+          <p:cNvPr id="16" name="Shape 14"/>
           <p:cNvSpPr/>
           <p:nvPr/>
         </p:nvSpPr>
         <p:spPr>
           <a:xfrm>
-            <a:off x="6263640" y="4197096"/>
-            <a:ext cx="5760720" cy="2606040"/>
+            <a:off x="365760" y="6446520"/>
+            <a:ext cx="11430000" cy="411480"/>
           </a:xfrm>
           <a:prstGeom prst="rect">
             <a:avLst/>
@@ -1353,14 +1524,14 @@
       </p:sp>
       <p:sp>
         <p:nvSpPr>
-          <p:cNvPr id="16" name="Text 14"/>
+          <p:cNvPr id="17" name="Text 15"/>
           <p:cNvSpPr/>
           <p:nvPr/>
         </p:nvSpPr>
         <p:spPr>
           <a:xfrm>
-            <a:off x="6492240" y="4288536"/>
-            <a:ext cx="5303520" cy="274320"/>
+            <a:off x="457200" y="6510528"/>
+            <a:ext cx="11247120" cy="292608"/>
           </a:xfrm>
           <a:prstGeom prst="rect">
             <a:avLst/>
@@ -1376,7 +1547,7 @@
               <a:buNone/>
             </a:pPr>
             <a:r>
-              <a:rPr lang="en-US" sz="1200" b="1" dirty="0">
+              <a:rPr lang="en-US" sz="1100" b="1" dirty="0">
                 <a:solidFill>
                   <a:srgbClr val="E8A838"/>
                 </a:solidFill>
@@ -1384,53 +1555,10 @@
                 <a:ea typeface="Calibri" pitchFamily="34" charset="-122"/>
                 <a:cs typeface="Calibri" pitchFamily="34" charset="-120"/>
               </a:rPr>
-              <a:t>Bottom Line</a:t>
-            </a:r>
-            <a:endParaRPr lang="en-US" sz="1200" dirty="0"/>
-          </a:p>
-        </p:txBody>
-      </p:sp>
-      <p:sp>
-        <p:nvSpPr>
-          <p:cNvPr id="17" name="Text 15"/>
-          <p:cNvSpPr/>
-          <p:nvPr/>
-        </p:nvSpPr>
-        <p:spPr>
-          <a:xfrm>
-            <a:off x="6492240" y="4581144"/>
-            <a:ext cx="5303520" cy="2148840"/>
-          </a:xfrm>
-          <a:prstGeom prst="rect">
-            <a:avLst/>
-          </a:prstGeom>
-          <a:noFill/>
-          <a:ln/>
-        </p:spPr>
-        <p:txBody>
-          <a:bodyPr wrap="square" lIns="0" tIns="0" rIns="0" bIns="0" rtlCol="0" anchor="ctr"/>
-          <a:lstStyle/>
-          <a:p>
-            <a:pPr marL="152400" indent="-152400">
-              <a:spcAft>
-                <a:spcPts val="100"/>
-              </a:spcAft>
-              <a:buSzPct val="100000"/>
-              <a:buChar char="■"/>
-            </a:pPr>
-            <a:r>
-              <a:rPr lang="en-US" sz="1000" b="1" dirty="0">
-                <a:solidFill>
-                  <a:srgbClr val="FFFFFF"/>
-                </a:solidFill>
-                <a:latin typeface="Calibri" pitchFamily="34" charset="0"/>
-                <a:ea typeface="Calibri" pitchFamily="34" charset="-122"/>
-                <a:cs typeface="Calibri" pitchFamily="34" charset="-120"/>
-              </a:rPr>
-              <a:t>FISCUs migrate faster than FCUs </a:t>
-            </a:r>
-            <a:r>
-              <a:rPr lang="en-US" sz="1000" dirty="0">
+              <a:t>Bottom Line:  </a:t>
+            </a:r>
+            <a:r>
+              <a:rPr lang="en-US" sz="1100" i="1" dirty="0">
                 <a:solidFill>
                   <a:srgbClr val="CADCFC"/>
                 </a:solidFill>
@@ -1438,168 +1566,9 @@
                 <a:ea typeface="Calibri" pitchFamily="34" charset="-122"/>
                 <a:cs typeface="Calibri" pitchFamily="34" charset="-120"/>
               </a:rPr>
-              <a:t>— particularly at the $1B threshold, where the system is concentrating into larger institutions more rapidly.</a:t>
-            </a:r>
-            <a:endParaRPr lang="en-US" sz="1000" dirty="0"/>
-          </a:p>
-          <a:p>
-            <a:pPr marL="0" indent="0">
-              <a:spcAft>
-                <a:spcPts val="100"/>
-              </a:spcAft>
-              <a:buNone/>
-            </a:pPr>
-            <a:endParaRPr lang="en-US" sz="1000" dirty="0"/>
-          </a:p>
-          <a:p>
-            <a:pPr marL="0" indent="0">
-              <a:spcAft>
-                <a:spcPts val="100"/>
-              </a:spcAft>
-              <a:buNone/>
-            </a:pPr>
-            <a:r>
-              <a:rPr lang="en-US" sz="1000" b="1" dirty="0">
-                <a:solidFill>
-                  <a:srgbClr val="FFFFFF"/>
-                </a:solidFill>
-                <a:latin typeface="Calibri" pitchFamily="34" charset="0"/>
-                <a:ea typeface="Calibri" pitchFamily="34" charset="-122"/>
-                <a:cs typeface="Calibri" pitchFamily="34" charset="-120"/>
-              </a:rPr>
-              <a:t>The $10B crossing is more pronounced </a:t>
-            </a:r>
-            <a:r>
-              <a:rPr lang="en-US" sz="1000" dirty="0">
-                <a:solidFill>
-                  <a:srgbClr val="CADCFC"/>
-                </a:solidFill>
-                <a:latin typeface="Calibri" pitchFamily="34" charset="0"/>
-                <a:ea typeface="Calibri" pitchFamily="34" charset="-122"/>
-                <a:cs typeface="Calibri" pitchFamily="34" charset="-120"/>
-              </a:rPr>
-              <a:t>— more FISCUs proportionally are approaching the Dodd-Frank supervisory cliff.</a:t>
-            </a:r>
-            <a:endParaRPr lang="en-US" sz="1000" dirty="0"/>
-          </a:p>
-          <a:p>
-            <a:pPr marL="0" indent="0">
-              <a:spcAft>
-                <a:spcPts val="100"/>
-              </a:spcAft>
-              <a:buNone/>
-            </a:pPr>
-            <a:endParaRPr lang="en-US" sz="1000" dirty="0"/>
-          </a:p>
-          <a:p>
-            <a:pPr marL="0" indent="0">
-              <a:spcAft>
-                <a:spcPts val="100"/>
-              </a:spcAft>
-              <a:buNone/>
-            </a:pPr>
-            <a:r>
-              <a:rPr lang="en-US" sz="1000" b="1" dirty="0">
-                <a:solidFill>
-                  <a:srgbClr val="FFFFFF"/>
-                </a:solidFill>
-                <a:latin typeface="Calibri" pitchFamily="34" charset="0"/>
-                <a:ea typeface="Calibri" pitchFamily="34" charset="-122"/>
-                <a:cs typeface="Calibri" pitchFamily="34" charset="-120"/>
-              </a:rPr>
-              <a:t>Downward migration is real but small </a:t>
-            </a:r>
-            <a:r>
-              <a:rPr lang="en-US" sz="1000" dirty="0">
-                <a:solidFill>
-                  <a:srgbClr val="CADCFC"/>
-                </a:solidFill>
-                <a:latin typeface="Calibri" pitchFamily="34" charset="0"/>
-                <a:ea typeface="Calibri" pitchFamily="34" charset="-122"/>
-                <a:cs typeface="Calibri" pitchFamily="34" charset="-120"/>
-              </a:rPr>
-              <a:t>— 1–2% of small FISCUs face genuine shrinkage risk, a pattern not seen on the federal side.</a:t>
-            </a:r>
-            <a:endParaRPr lang="en-US" sz="1000" dirty="0"/>
-          </a:p>
-          <a:p>
-            <a:pPr marL="0" indent="0">
-              <a:spcAft>
-                <a:spcPts val="100"/>
-              </a:spcAft>
-              <a:buNone/>
-            </a:pPr>
-            <a:endParaRPr lang="en-US" sz="1000" dirty="0"/>
-          </a:p>
-          <a:p>
-            <a:pPr marL="0" indent="0">
-              <a:spcAft>
-                <a:spcPts val="100"/>
-              </a:spcAft>
-              <a:buNone/>
-            </a:pPr>
-            <a:r>
-              <a:rPr lang="en-US" sz="1000" b="1" dirty="0">
-                <a:solidFill>
-                  <a:srgbClr val="E8A838"/>
-                </a:solidFill>
-                <a:latin typeface="Calibri" pitchFamily="34" charset="0"/>
-                <a:ea typeface="Calibri" pitchFamily="34" charset="-122"/>
-                <a:cs typeface="Calibri" pitchFamily="34" charset="-120"/>
-              </a:rPr>
-              <a:t>Why faster? </a:t>
-            </a:r>
-            <a:r>
-              <a:rPr lang="en-US" sz="1000" i="1" dirty="0">
-                <a:solidFill>
-                  <a:srgbClr val="CADCFC"/>
-                </a:solidFill>
-                <a:latin typeface="Calibri" pitchFamily="34" charset="0"/>
-                <a:ea typeface="Calibri" pitchFamily="34" charset="-122"/>
-                <a:cs typeface="Calibri" pitchFamily="34" charset="-120"/>
-              </a:rPr>
-              <a:t>State charters typically operate under more flexible regulatory frameworks and field-of-membership rules, allowing FISCUs to expand membership, products, and geographic reach more aggressively — which translates into faster asset growth.</a:t>
-            </a:r>
-            <a:endParaRPr lang="en-US" sz="1000" dirty="0"/>
-          </a:p>
-        </p:txBody>
-      </p:sp>
-      <p:sp>
-        <p:nvSpPr>
-          <p:cNvPr id="18" name="Text 16"/>
-          <p:cNvSpPr/>
-          <p:nvPr/>
-        </p:nvSpPr>
-        <p:spPr>
-          <a:xfrm>
-            <a:off x="365760" y="6629400"/>
-            <a:ext cx="11430000" cy="182880"/>
-          </a:xfrm>
-          <a:prstGeom prst="rect">
-            <a:avLst/>
-          </a:prstGeom>
-          <a:noFill/>
-          <a:ln/>
-        </p:spPr>
-        <p:txBody>
-          <a:bodyPr wrap="square" lIns="0" tIns="0" rIns="0" bIns="0" rtlCol="0" anchor="ctr"/>
-          <a:lstStyle/>
-          <a:p>
-            <a:pPr marL="0" indent="0">
-              <a:buNone/>
-            </a:pPr>
-            <a:r>
-              <a:rPr lang="en-US" sz="900" i="1" dirty="0">
-                <a:solidFill>
-                  <a:srgbClr val="666666"/>
-                </a:solidFill>
-                <a:latin typeface="Calibri" pitchFamily="34" charset="0"/>
-                <a:ea typeface="Calibri" pitchFamily="34" charset="-122"/>
-                <a:cs typeface="Calibri" pitchFamily="34" charset="-120"/>
-              </a:rPr>
-              <a:t>Source: NCUA Call Reports  |  Individual ARIMA forecasts of 1,613 active FISCUs as of 2025 Q3</a:t>
-            </a:r>
-            <a:endParaRPr lang="en-US" sz="900" dirty="0"/>
+              <a:t>FCU growth is concentrated in the largest coastal states (NY, TX, CA); FISCU growth is concentrated in Midwest states (WI, MI, IL) — likely reflecting differences in state regulatory frameworks.</a:t>
+            </a:r>
+            <a:endParaRPr lang="en-US" sz="1100" dirty="0"/>
           </a:p>
         </p:txBody>
       </p:sp>
